--- a/image/flowchart.pptx
+++ b/image/flowchart.pptx
@@ -197,7 +197,7 @@
           <a:p>
             <a:fld id="{AE391BAF-91F8-4B50-BA74-917754362F3D}" type="datetimeFigureOut">
               <a:rPr kumimoji="1" lang="ja-JP" altLang="en-US" smtClean="0"/>
-              <a:t>2025/10/29</a:t>
+              <a:t>2026/3/7</a:t>
             </a:fld>
             <a:endParaRPr kumimoji="1" lang="ja-JP" altLang="en-US"/>
           </a:p>
@@ -711,7 +711,7 @@
           <a:p>
             <a:fld id="{60C89CFB-3BD4-45D4-8FCC-79850387BF7C}" type="datetimeFigureOut">
               <a:rPr kumimoji="1" lang="ja-JP" altLang="en-US" smtClean="0"/>
-              <a:t>2025/10/29</a:t>
+              <a:t>2026/3/7</a:t>
             </a:fld>
             <a:endParaRPr kumimoji="1" lang="ja-JP" altLang="en-US"/>
           </a:p>
@@ -913,7 +913,7 @@
           <a:p>
             <a:fld id="{60C89CFB-3BD4-45D4-8FCC-79850387BF7C}" type="datetimeFigureOut">
               <a:rPr kumimoji="1" lang="ja-JP" altLang="en-US" smtClean="0"/>
-              <a:t>2025/10/29</a:t>
+              <a:t>2026/3/7</a:t>
             </a:fld>
             <a:endParaRPr kumimoji="1" lang="ja-JP" altLang="en-US"/>
           </a:p>
@@ -1125,7 +1125,7 @@
           <a:p>
             <a:fld id="{60C89CFB-3BD4-45D4-8FCC-79850387BF7C}" type="datetimeFigureOut">
               <a:rPr kumimoji="1" lang="ja-JP" altLang="en-US" smtClean="0"/>
-              <a:t>2025/10/29</a:t>
+              <a:t>2026/3/7</a:t>
             </a:fld>
             <a:endParaRPr kumimoji="1" lang="ja-JP" altLang="en-US"/>
           </a:p>
@@ -1327,7 +1327,7 @@
           <a:p>
             <a:fld id="{60C89CFB-3BD4-45D4-8FCC-79850387BF7C}" type="datetimeFigureOut">
               <a:rPr kumimoji="1" lang="ja-JP" altLang="en-US" smtClean="0"/>
-              <a:t>2025/10/29</a:t>
+              <a:t>2026/3/7</a:t>
             </a:fld>
             <a:endParaRPr kumimoji="1" lang="ja-JP" altLang="en-US"/>
           </a:p>
@@ -1573,7 +1573,7 @@
           <a:p>
             <a:fld id="{60C89CFB-3BD4-45D4-8FCC-79850387BF7C}" type="datetimeFigureOut">
               <a:rPr kumimoji="1" lang="ja-JP" altLang="en-US" smtClean="0"/>
-              <a:t>2025/10/29</a:t>
+              <a:t>2026/3/7</a:t>
             </a:fld>
             <a:endParaRPr kumimoji="1" lang="ja-JP" altLang="en-US"/>
           </a:p>
@@ -1869,7 +1869,7 @@
           <a:p>
             <a:fld id="{60C89CFB-3BD4-45D4-8FCC-79850387BF7C}" type="datetimeFigureOut">
               <a:rPr kumimoji="1" lang="ja-JP" altLang="en-US" smtClean="0"/>
-              <a:t>2025/10/29</a:t>
+              <a:t>2026/3/7</a:t>
             </a:fld>
             <a:endParaRPr kumimoji="1" lang="ja-JP" altLang="en-US"/>
           </a:p>
@@ -2300,7 +2300,7 @@
           <a:p>
             <a:fld id="{60C89CFB-3BD4-45D4-8FCC-79850387BF7C}" type="datetimeFigureOut">
               <a:rPr kumimoji="1" lang="ja-JP" altLang="en-US" smtClean="0"/>
-              <a:t>2025/10/29</a:t>
+              <a:t>2026/3/7</a:t>
             </a:fld>
             <a:endParaRPr kumimoji="1" lang="ja-JP" altLang="en-US"/>
           </a:p>
@@ -2418,7 +2418,7 @@
           <a:p>
             <a:fld id="{60C89CFB-3BD4-45D4-8FCC-79850387BF7C}" type="datetimeFigureOut">
               <a:rPr kumimoji="1" lang="ja-JP" altLang="en-US" smtClean="0"/>
-              <a:t>2025/10/29</a:t>
+              <a:t>2026/3/7</a:t>
             </a:fld>
             <a:endParaRPr kumimoji="1" lang="ja-JP" altLang="en-US"/>
           </a:p>
@@ -2513,7 +2513,7 @@
           <a:p>
             <a:fld id="{60C89CFB-3BD4-45D4-8FCC-79850387BF7C}" type="datetimeFigureOut">
               <a:rPr kumimoji="1" lang="ja-JP" altLang="en-US" smtClean="0"/>
-              <a:t>2025/10/29</a:t>
+              <a:t>2026/3/7</a:t>
             </a:fld>
             <a:endParaRPr kumimoji="1" lang="ja-JP" altLang="en-US"/>
           </a:p>
@@ -2822,7 +2822,7 @@
           <a:p>
             <a:fld id="{60C89CFB-3BD4-45D4-8FCC-79850387BF7C}" type="datetimeFigureOut">
               <a:rPr kumimoji="1" lang="ja-JP" altLang="en-US" smtClean="0"/>
-              <a:t>2025/10/29</a:t>
+              <a:t>2026/3/7</a:t>
             </a:fld>
             <a:endParaRPr kumimoji="1" lang="ja-JP" altLang="en-US"/>
           </a:p>
@@ -3079,7 +3079,7 @@
           <a:p>
             <a:fld id="{60C89CFB-3BD4-45D4-8FCC-79850387BF7C}" type="datetimeFigureOut">
               <a:rPr kumimoji="1" lang="ja-JP" altLang="en-US" smtClean="0"/>
-              <a:t>2025/10/29</a:t>
+              <a:t>2026/3/7</a:t>
             </a:fld>
             <a:endParaRPr kumimoji="1" lang="ja-JP" altLang="en-US"/>
           </a:p>
@@ -3324,7 +3324,7 @@
           <a:p>
             <a:fld id="{60C89CFB-3BD4-45D4-8FCC-79850387BF7C}" type="datetimeFigureOut">
               <a:rPr kumimoji="1" lang="ja-JP" altLang="en-US" smtClean="0"/>
-              <a:t>2025/10/29</a:t>
+              <a:t>2026/3/7</a:t>
             </a:fld>
             <a:endParaRPr kumimoji="1" lang="ja-JP" altLang="en-US"/>
           </a:p>
@@ -3883,7 +3883,47 @@
                   <a:latin typeface="Times New Roman" panose="02020603050405020304" pitchFamily="18" charset="0"/>
                   <a:cs typeface="Times New Roman" panose="02020603050405020304" pitchFamily="18" charset="0"/>
                 </a:rPr>
-                <a:t>Response (N = 6,142)</a:t>
+                <a:t>Positive</a:t>
+              </a:r>
+              <a:r>
+                <a:rPr lang="ja-JP" altLang="en-US" sz="1350" b="1" dirty="0">
+                  <a:solidFill>
+                    <a:schemeClr val="tx1"/>
+                  </a:solidFill>
+                  <a:latin typeface="Times New Roman" panose="02020603050405020304" pitchFamily="18" charset="0"/>
+                  <a:cs typeface="Times New Roman" panose="02020603050405020304" pitchFamily="18" charset="0"/>
+                </a:rPr>
+                <a:t> </a:t>
+              </a:r>
+              <a:r>
+                <a:rPr lang="en-US" altLang="ja-JP" sz="1350" b="1" dirty="0">
+                  <a:solidFill>
+                    <a:schemeClr val="tx1"/>
+                  </a:solidFill>
+                  <a:latin typeface="Times New Roman" panose="02020603050405020304" pitchFamily="18" charset="0"/>
+                  <a:cs typeface="Times New Roman" panose="02020603050405020304" pitchFamily="18" charset="0"/>
+                </a:rPr>
+                <a:t>Intention </a:t>
+              </a:r>
+              <a:r>
+                <a:rPr lang="en-US" altLang="ja-JP" sz="1350" b="1">
+                  <a:solidFill>
+                    <a:schemeClr val="tx1"/>
+                  </a:solidFill>
+                  <a:latin typeface="Times New Roman" panose="02020603050405020304" pitchFamily="18" charset="0"/>
+                  <a:cs typeface="Times New Roman" panose="02020603050405020304" pitchFamily="18" charset="0"/>
+                </a:rPr>
+                <a:t>at Response </a:t>
+              </a:r>
+              <a:r>
+                <a:rPr lang="en-US" altLang="ja-JP" sz="1350" b="1" dirty="0">
+                  <a:solidFill>
+                    <a:schemeClr val="tx1"/>
+                  </a:solidFill>
+                  <a:latin typeface="Times New Roman" panose="02020603050405020304" pitchFamily="18" charset="0"/>
+                  <a:cs typeface="Times New Roman" panose="02020603050405020304" pitchFamily="18" charset="0"/>
+                </a:rPr>
+                <a:t>(N = 6,143)</a:t>
               </a:r>
             </a:p>
             <a:p>
@@ -4112,7 +4152,27 @@
                   <a:latin typeface="Times New Roman" panose="02020603050405020304" pitchFamily="18" charset="0"/>
                   <a:cs typeface="Times New Roman" panose="02020603050405020304" pitchFamily="18" charset="0"/>
                 </a:rPr>
-                <a:t>CT [Primary Outcome] (N = 2,651)</a:t>
+                <a:t>CT </a:t>
+              </a:r>
+              <a:r>
+                <a:rPr lang="en-US" altLang="ja-JP" sz="1350" b="1">
+                  <a:solidFill>
+                    <a:schemeClr val="tx1"/>
+                  </a:solidFill>
+                  <a:latin typeface="Times New Roman" panose="02020603050405020304" pitchFamily="18" charset="0"/>
+                  <a:cs typeface="Times New Roman" panose="02020603050405020304" pitchFamily="18" charset="0"/>
+                </a:rPr>
+                <a:t>[Primary Outcome</a:t>
+              </a:r>
+              <a:r>
+                <a:rPr lang="en-US" altLang="ja-JP" sz="1350" b="1" dirty="0">
+                  <a:solidFill>
+                    <a:schemeClr val="tx1"/>
+                  </a:solidFill>
+                  <a:latin typeface="Times New Roman" panose="02020603050405020304" pitchFamily="18" charset="0"/>
+                  <a:cs typeface="Times New Roman" panose="02020603050405020304" pitchFamily="18" charset="0"/>
+                </a:rPr>
+                <a:t>] (N = 2,653)</a:t>
               </a:r>
             </a:p>
             <a:p>
@@ -4908,8 +4968,8 @@
           </p:nvSpPr>
           <p:spPr>
             <a:xfrm>
-              <a:off x="5610707" y="3767347"/>
-              <a:ext cx="1906092" cy="440874"/>
+              <a:off x="5610706" y="3695942"/>
+              <a:ext cx="3317287" cy="908051"/>
             </a:xfrm>
             <a:prstGeom prst="roundRect">
               <a:avLst/>
@@ -4952,15 +5012,40 @@
                   <a:latin typeface="Times New Roman" panose="02020603050405020304" pitchFamily="18" charset="0"/>
                   <a:cs typeface="Times New Roman" panose="02020603050405020304" pitchFamily="18" charset="0"/>
                 </a:rPr>
-                <a:t>Dropout (N = 3,491)</a:t>
+                <a:t>Dropout (N = 3,490)</a:t>
               </a:r>
-              <a:endParaRPr lang="en-US" altLang="ja-JP" sz="1350" dirty="0">
-                <a:solidFill>
-                  <a:schemeClr val="tx1"/>
-                </a:solidFill>
-                <a:latin typeface="Times New Roman" panose="02020603050405020304" pitchFamily="18" charset="0"/>
-                <a:cs typeface="Times New Roman" panose="02020603050405020304" pitchFamily="18" charset="0"/>
-              </a:endParaRPr>
+            </a:p>
+            <a:p>
+              <a:pPr marL="285750" indent="-285750">
+                <a:buFont typeface="Arial" panose="020B0604020202020204" pitchFamily="34" charset="0"/>
+                <a:buChar char="•"/>
+              </a:pPr>
+              <a:r>
+                <a:rPr lang="en-US" altLang="ja-JP" sz="1350" dirty="0">
+                  <a:solidFill>
+                    <a:schemeClr val="tx1"/>
+                  </a:solidFill>
+                  <a:latin typeface="Times New Roman" panose="02020603050405020304" pitchFamily="18" charset="0"/>
+                  <a:cs typeface="Times New Roman" panose="02020603050405020304" pitchFamily="18" charset="0"/>
+                </a:rPr>
+                <a:t>Donor-related dropout (N = 2,940)</a:t>
+              </a:r>
+            </a:p>
+            <a:p>
+              <a:pPr marL="285750" indent="-285750">
+                <a:buFont typeface="Arial" panose="020B0604020202020204" pitchFamily="34" charset="0"/>
+                <a:buChar char="•"/>
+              </a:pPr>
+              <a:r>
+                <a:rPr lang="en-US" altLang="ja-JP" sz="1350" dirty="0">
+                  <a:solidFill>
+                    <a:schemeClr val="tx1"/>
+                  </a:solidFill>
+                  <a:latin typeface="Times New Roman" panose="02020603050405020304" pitchFamily="18" charset="0"/>
+                  <a:cs typeface="Times New Roman" panose="02020603050405020304" pitchFamily="18" charset="0"/>
+                </a:rPr>
+                <a:t>Patient-related dropout (N = 550) </a:t>
+              </a:r>
             </a:p>
           </p:txBody>
         </p:sp>
@@ -4975,14 +5060,13 @@
             </p:cNvPr>
             <p:cNvCxnSpPr>
               <a:cxnSpLocks/>
-              <a:endCxn id="96" idx="1"/>
             </p:cNvCxnSpPr>
             <p:nvPr/>
           </p:nvCxnSpPr>
           <p:spPr>
-            <a:xfrm>
-              <a:off x="2864931" y="3982214"/>
-              <a:ext cx="2745776" cy="5570"/>
+            <a:xfrm flipV="1">
+              <a:off x="2864931" y="3982195"/>
+              <a:ext cx="2745775" cy="19"/>
             </a:xfrm>
             <a:prstGeom prst="straightConnector1">
               <a:avLst/>
@@ -5068,7 +5152,7 @@
                   <a:latin typeface="Times New Roman" panose="02020603050405020304" pitchFamily="18" charset="0"/>
                   <a:cs typeface="Times New Roman" panose="02020603050405020304" pitchFamily="18" charset="0"/>
                 </a:rPr>
-                <a:t>Dropout (N = 1,950)</a:t>
+                <a:t>Dropout (N = 1,952)</a:t>
               </a:r>
               <a:endParaRPr lang="en-US" altLang="ja-JP" sz="1350" dirty="0">
                 <a:solidFill>

--- a/image/flowchart.pptx
+++ b/image/flowchart.pptx
@@ -197,7 +197,7 @@
           <a:p>
             <a:fld id="{AE391BAF-91F8-4B50-BA74-917754362F3D}" type="datetimeFigureOut">
               <a:rPr kumimoji="1" lang="ja-JP" altLang="en-US" smtClean="0"/>
-              <a:t>2026/3/7</a:t>
+              <a:t>2026/3/28</a:t>
             </a:fld>
             <a:endParaRPr kumimoji="1" lang="ja-JP" altLang="en-US"/>
           </a:p>
@@ -711,7 +711,7 @@
           <a:p>
             <a:fld id="{60C89CFB-3BD4-45D4-8FCC-79850387BF7C}" type="datetimeFigureOut">
               <a:rPr kumimoji="1" lang="ja-JP" altLang="en-US" smtClean="0"/>
-              <a:t>2026/3/7</a:t>
+              <a:t>2026/3/28</a:t>
             </a:fld>
             <a:endParaRPr kumimoji="1" lang="ja-JP" altLang="en-US"/>
           </a:p>
@@ -913,7 +913,7 @@
           <a:p>
             <a:fld id="{60C89CFB-3BD4-45D4-8FCC-79850387BF7C}" type="datetimeFigureOut">
               <a:rPr kumimoji="1" lang="ja-JP" altLang="en-US" smtClean="0"/>
-              <a:t>2026/3/7</a:t>
+              <a:t>2026/3/28</a:t>
             </a:fld>
             <a:endParaRPr kumimoji="1" lang="ja-JP" altLang="en-US"/>
           </a:p>
@@ -1125,7 +1125,7 @@
           <a:p>
             <a:fld id="{60C89CFB-3BD4-45D4-8FCC-79850387BF7C}" type="datetimeFigureOut">
               <a:rPr kumimoji="1" lang="ja-JP" altLang="en-US" smtClean="0"/>
-              <a:t>2026/3/7</a:t>
+              <a:t>2026/3/28</a:t>
             </a:fld>
             <a:endParaRPr kumimoji="1" lang="ja-JP" altLang="en-US"/>
           </a:p>
@@ -1327,7 +1327,7 @@
           <a:p>
             <a:fld id="{60C89CFB-3BD4-45D4-8FCC-79850387BF7C}" type="datetimeFigureOut">
               <a:rPr kumimoji="1" lang="ja-JP" altLang="en-US" smtClean="0"/>
-              <a:t>2026/3/7</a:t>
+              <a:t>2026/3/28</a:t>
             </a:fld>
             <a:endParaRPr kumimoji="1" lang="ja-JP" altLang="en-US"/>
           </a:p>
@@ -1573,7 +1573,7 @@
           <a:p>
             <a:fld id="{60C89CFB-3BD4-45D4-8FCC-79850387BF7C}" type="datetimeFigureOut">
               <a:rPr kumimoji="1" lang="ja-JP" altLang="en-US" smtClean="0"/>
-              <a:t>2026/3/7</a:t>
+              <a:t>2026/3/28</a:t>
             </a:fld>
             <a:endParaRPr kumimoji="1" lang="ja-JP" altLang="en-US"/>
           </a:p>
@@ -1869,7 +1869,7 @@
           <a:p>
             <a:fld id="{60C89CFB-3BD4-45D4-8FCC-79850387BF7C}" type="datetimeFigureOut">
               <a:rPr kumimoji="1" lang="ja-JP" altLang="en-US" smtClean="0"/>
-              <a:t>2026/3/7</a:t>
+              <a:t>2026/3/28</a:t>
             </a:fld>
             <a:endParaRPr kumimoji="1" lang="ja-JP" altLang="en-US"/>
           </a:p>
@@ -2300,7 +2300,7 @@
           <a:p>
             <a:fld id="{60C89CFB-3BD4-45D4-8FCC-79850387BF7C}" type="datetimeFigureOut">
               <a:rPr kumimoji="1" lang="ja-JP" altLang="en-US" smtClean="0"/>
-              <a:t>2026/3/7</a:t>
+              <a:t>2026/3/28</a:t>
             </a:fld>
             <a:endParaRPr kumimoji="1" lang="ja-JP" altLang="en-US"/>
           </a:p>
@@ -2418,7 +2418,7 @@
           <a:p>
             <a:fld id="{60C89CFB-3BD4-45D4-8FCC-79850387BF7C}" type="datetimeFigureOut">
               <a:rPr kumimoji="1" lang="ja-JP" altLang="en-US" smtClean="0"/>
-              <a:t>2026/3/7</a:t>
+              <a:t>2026/3/28</a:t>
             </a:fld>
             <a:endParaRPr kumimoji="1" lang="ja-JP" altLang="en-US"/>
           </a:p>
@@ -2513,7 +2513,7 @@
           <a:p>
             <a:fld id="{60C89CFB-3BD4-45D4-8FCC-79850387BF7C}" type="datetimeFigureOut">
               <a:rPr kumimoji="1" lang="ja-JP" altLang="en-US" smtClean="0"/>
-              <a:t>2026/3/7</a:t>
+              <a:t>2026/3/28</a:t>
             </a:fld>
             <a:endParaRPr kumimoji="1" lang="ja-JP" altLang="en-US"/>
           </a:p>
@@ -2822,7 +2822,7 @@
           <a:p>
             <a:fld id="{60C89CFB-3BD4-45D4-8FCC-79850387BF7C}" type="datetimeFigureOut">
               <a:rPr kumimoji="1" lang="ja-JP" altLang="en-US" smtClean="0"/>
-              <a:t>2026/3/7</a:t>
+              <a:t>2026/3/28</a:t>
             </a:fld>
             <a:endParaRPr kumimoji="1" lang="ja-JP" altLang="en-US"/>
           </a:p>
@@ -3079,7 +3079,7 @@
           <a:p>
             <a:fld id="{60C89CFB-3BD4-45D4-8FCC-79850387BF7C}" type="datetimeFigureOut">
               <a:rPr kumimoji="1" lang="ja-JP" altLang="en-US" smtClean="0"/>
-              <a:t>2026/3/7</a:t>
+              <a:t>2026/3/28</a:t>
             </a:fld>
             <a:endParaRPr kumimoji="1" lang="ja-JP" altLang="en-US"/>
           </a:p>
@@ -3324,7 +3324,7 @@
           <a:p>
             <a:fld id="{60C89CFB-3BD4-45D4-8FCC-79850387BF7C}" type="datetimeFigureOut">
               <a:rPr kumimoji="1" lang="ja-JP" altLang="en-US" smtClean="0"/>
-              <a:t>2026/3/7</a:t>
+              <a:t>2026/3/28</a:t>
             </a:fld>
             <a:endParaRPr kumimoji="1" lang="ja-JP" altLang="en-US"/>
           </a:p>
@@ -3903,27 +3903,7 @@
                   <a:latin typeface="Times New Roman" panose="02020603050405020304" pitchFamily="18" charset="0"/>
                   <a:cs typeface="Times New Roman" panose="02020603050405020304" pitchFamily="18" charset="0"/>
                 </a:rPr>
-                <a:t>Intention </a:t>
-              </a:r>
-              <a:r>
-                <a:rPr lang="en-US" altLang="ja-JP" sz="1350" b="1">
-                  <a:solidFill>
-                    <a:schemeClr val="tx1"/>
-                  </a:solidFill>
-                  <a:latin typeface="Times New Roman" panose="02020603050405020304" pitchFamily="18" charset="0"/>
-                  <a:cs typeface="Times New Roman" panose="02020603050405020304" pitchFamily="18" charset="0"/>
-                </a:rPr>
-                <a:t>at Response </a:t>
-              </a:r>
-              <a:r>
-                <a:rPr lang="en-US" altLang="ja-JP" sz="1350" b="1" dirty="0">
-                  <a:solidFill>
-                    <a:schemeClr val="tx1"/>
-                  </a:solidFill>
-                  <a:latin typeface="Times New Roman" panose="02020603050405020304" pitchFamily="18" charset="0"/>
-                  <a:cs typeface="Times New Roman" panose="02020603050405020304" pitchFamily="18" charset="0"/>
-                </a:rPr>
-                <a:t>(N = 6,143)</a:t>
+                <a:t>Intention at Response (N = 6,142)</a:t>
               </a:r>
             </a:p>
             <a:p>
@@ -4152,27 +4132,7 @@
                   <a:latin typeface="Times New Roman" panose="02020603050405020304" pitchFamily="18" charset="0"/>
                   <a:cs typeface="Times New Roman" panose="02020603050405020304" pitchFamily="18" charset="0"/>
                 </a:rPr>
-                <a:t>CT </a:t>
-              </a:r>
-              <a:r>
-                <a:rPr lang="en-US" altLang="ja-JP" sz="1350" b="1">
-                  <a:solidFill>
-                    <a:schemeClr val="tx1"/>
-                  </a:solidFill>
-                  <a:latin typeface="Times New Roman" panose="02020603050405020304" pitchFamily="18" charset="0"/>
-                  <a:cs typeface="Times New Roman" panose="02020603050405020304" pitchFamily="18" charset="0"/>
-                </a:rPr>
-                <a:t>[Primary Outcome</a:t>
-              </a:r>
-              <a:r>
-                <a:rPr lang="en-US" altLang="ja-JP" sz="1350" b="1" dirty="0">
-                  <a:solidFill>
-                    <a:schemeClr val="tx1"/>
-                  </a:solidFill>
-                  <a:latin typeface="Times New Roman" panose="02020603050405020304" pitchFamily="18" charset="0"/>
-                  <a:cs typeface="Times New Roman" panose="02020603050405020304" pitchFamily="18" charset="0"/>
-                </a:rPr>
-                <a:t>] (N = 2,653)</a:t>
+                <a:t>CT [Primary Outcome] (N = 2,650)</a:t>
               </a:r>
             </a:p>
             <a:p>
@@ -4248,7 +4208,7 @@
                   <a:latin typeface="Times New Roman" panose="02020603050405020304" pitchFamily="18" charset="0"/>
                   <a:cs typeface="Times New Roman" panose="02020603050405020304" pitchFamily="18" charset="0"/>
                 </a:rPr>
-                <a:t>Final Selection (N = 701)</a:t>
+                <a:t>Final Selection (N = 698)</a:t>
               </a:r>
             </a:p>
             <a:p>
@@ -4324,7 +4284,7 @@
                   <a:latin typeface="Times New Roman" panose="02020603050405020304" pitchFamily="18" charset="0"/>
                   <a:cs typeface="Times New Roman" panose="02020603050405020304" pitchFamily="18" charset="0"/>
                 </a:rPr>
-                <a:t>Donation (N = 503)</a:t>
+                <a:t>Donation (N = 501)</a:t>
               </a:r>
             </a:p>
             <a:p>
@@ -5012,7 +4972,7 @@
                   <a:latin typeface="Times New Roman" panose="02020603050405020304" pitchFamily="18" charset="0"/>
                   <a:cs typeface="Times New Roman" panose="02020603050405020304" pitchFamily="18" charset="0"/>
                 </a:rPr>
-                <a:t>Dropout (N = 3,490)</a:t>
+                <a:t>Dropout (N = 3,492)</a:t>
               </a:r>
             </a:p>
             <a:p>
@@ -5028,7 +4988,7 @@
                   <a:latin typeface="Times New Roman" panose="02020603050405020304" pitchFamily="18" charset="0"/>
                   <a:cs typeface="Times New Roman" panose="02020603050405020304" pitchFamily="18" charset="0"/>
                 </a:rPr>
-                <a:t>Donor-related dropout (N = 2,940)</a:t>
+                <a:t>Donor-related dropout (N = 2,942)</a:t>
               </a:r>
             </a:p>
             <a:p>
@@ -5268,7 +5228,7 @@
                   <a:latin typeface="Times New Roman" panose="02020603050405020304" pitchFamily="18" charset="0"/>
                   <a:cs typeface="Times New Roman" panose="02020603050405020304" pitchFamily="18" charset="0"/>
                 </a:rPr>
-                <a:t>Dropout (N = 198)</a:t>
+                <a:t>Dropout (N = 197)</a:t>
               </a:r>
             </a:p>
             <a:p>
@@ -5360,8 +5320,25 @@
                   <a:latin typeface="Times New Roman" panose="02020603050405020304" pitchFamily="18" charset="0"/>
                   <a:cs typeface="Times New Roman" panose="02020603050405020304" pitchFamily="18" charset="0"/>
                 </a:rPr>
-                <a:t>Dropout after final consent (N = 124)</a:t>
+                <a:t>Dropout after final consent (N </a:t>
               </a:r>
+              <a:r>
+                <a:rPr lang="en-US" altLang="ja-JP" sz="1350">
+                  <a:solidFill>
+                    <a:schemeClr val="tx1"/>
+                  </a:solidFill>
+                  <a:latin typeface="Times New Roman" panose="02020603050405020304" pitchFamily="18" charset="0"/>
+                  <a:cs typeface="Times New Roman" panose="02020603050405020304" pitchFamily="18" charset="0"/>
+                </a:rPr>
+                <a:t>= 123)</a:t>
+              </a:r>
+              <a:endParaRPr lang="en-US" altLang="ja-JP" sz="1350" dirty="0">
+                <a:solidFill>
+                  <a:schemeClr val="tx1"/>
+                </a:solidFill>
+                <a:latin typeface="Times New Roman" panose="02020603050405020304" pitchFamily="18" charset="0"/>
+                <a:cs typeface="Times New Roman" panose="02020603050405020304" pitchFamily="18" charset="0"/>
+              </a:endParaRPr>
             </a:p>
           </p:txBody>
         </p:sp>
